--- a/test/pptx/comparison/non-text-first/output.pptx
+++ b/test/pptx/comparison/non-text-first/output.pptx
@@ -3175,6 +3175,31 @@
           </a:graphicData>
         </a:graphic>
       </p:graphicFrame>
+      <p:sp>
+        <p:nvSpPr>
+          <p:cNvPr id="3" name="Content Placeholder 2"/>
+          <p:cNvSpPr>
+            <a:spLocks noGrp="1"/>
+          </p:cNvSpPr>
+          <p:nvPr>
+            <p:ph idx="1" sz="half"/>
+          </p:nvPr>
+        </p:nvSpPr>
+        <p:spPr/>
+        <p:txBody>
+          <a:bodyPr/>
+          <a:lstStyle/>
+          <a:p>
+            <a:pPr lvl="0" indent="0" marL="0">
+              <a:buNone/>
+            </a:pPr>
+            <a:r>
+              <a:rPr/>
+              <a:t>Plus a paragraph here</a:t>
+            </a:r>
+          </a:p>
+        </p:txBody>
+      </p:sp>
       <p:pic>
         <p:nvPicPr>
           <p:cNvPr descr="fig:  lalune.jpg" id="0" name="Picture 1"/>
